--- a/Presentation/Global AI Adoption & Workforce Impact Dataset09Jun.pptx
+++ b/Presentation/Global AI Adoption & Workforce Impact Dataset09Jun.pptx
@@ -9938,7 +9938,7 @@
             </a:r>
             <a:r>
               <a:rPr lang="en-US" sz="1600" dirty="0"/>
-              <a:t>Evaluate factors associated with successful AI implementation</a:t>
+              <a:t>Analyze AI adoption trends, business outcomes &amp; workforce impact</a:t>
             </a:r>
           </a:p>
           <a:p>
@@ -10699,6 +10699,58 @@
           </a:p>
         </p:txBody>
       </p:sp>
+      <p:sp>
+        <p:nvSpPr>
+          <p:cNvPr id="13" name="Rectangle 12">
+            <a:extLst>
+              <a:ext uri="{FF2B5EF4-FFF2-40B4-BE49-F238E27FC236}">
+                <a16:creationId xmlns:a16="http://schemas.microsoft.com/office/drawing/2014/main" id="{DA073DEF-9BAD-F67B-3460-32530144D5C7}"/>
+              </a:ext>
+            </a:extLst>
+          </p:cNvPr>
+          <p:cNvSpPr/>
+          <p:nvPr/>
+        </p:nvSpPr>
+        <p:spPr>
+          <a:xfrm>
+            <a:off x="5956188" y="2646727"/>
+            <a:ext cx="5140392" cy="2916599"/>
+          </a:xfrm>
+          <a:prstGeom prst="rect">
+            <a:avLst/>
+          </a:prstGeom>
+          <a:solidFill>
+            <a:srgbClr val="FFFFFF"/>
+          </a:solidFill>
+          <a:ln>
+            <a:noFill/>
+          </a:ln>
+        </p:spPr>
+        <p:style>
+          <a:lnRef idx="2">
+            <a:schemeClr val="accent1">
+              <a:shade val="15000"/>
+            </a:schemeClr>
+          </a:lnRef>
+          <a:fillRef idx="1">
+            <a:schemeClr val="accent1"/>
+          </a:fillRef>
+          <a:effectRef idx="0">
+            <a:schemeClr val="accent1"/>
+          </a:effectRef>
+          <a:fontRef idx="minor">
+            <a:schemeClr val="lt1"/>
+          </a:fontRef>
+        </p:style>
+        <p:txBody>
+          <a:bodyPr rtlCol="0" anchor="ctr"/>
+          <a:lstStyle/>
+          <a:p>
+            <a:pPr algn="ctr"/>
+            <a:endParaRPr lang="en-US"/>
+          </a:p>
+        </p:txBody>
+      </p:sp>
       <p:pic>
         <p:nvPicPr>
           <p:cNvPr id="5" name="Picture 4">
@@ -10715,14 +10767,15 @@
         </p:nvPicPr>
         <p:blipFill>
           <a:blip r:embed="rId3"/>
+          <a:srcRect b="3854"/>
           <a:stretch>
             <a:fillRect/>
           </a:stretch>
         </p:blipFill>
         <p:spPr>
           <a:xfrm>
-            <a:off x="6003241" y="2416433"/>
-            <a:ext cx="5965677" cy="3146893"/>
+            <a:off x="6003241" y="2416434"/>
+            <a:ext cx="5965677" cy="3025612"/>
           </a:xfrm>
           <a:prstGeom prst="rect">
             <a:avLst/>
@@ -10994,6 +11047,213 @@
           </a:p>
         </p:txBody>
       </p:sp>
+      <p:grpSp>
+        <p:nvGrpSpPr>
+          <p:cNvPr id="11" name="Group 10">
+            <a:extLst>
+              <a:ext uri="{FF2B5EF4-FFF2-40B4-BE49-F238E27FC236}">
+                <a16:creationId xmlns:a16="http://schemas.microsoft.com/office/drawing/2014/main" id="{7BBFAF35-D7E8-BE88-24C9-26E2447F44AB}"/>
+              </a:ext>
+            </a:extLst>
+          </p:cNvPr>
+          <p:cNvGrpSpPr/>
+          <p:nvPr/>
+        </p:nvGrpSpPr>
+        <p:grpSpPr>
+          <a:xfrm>
+            <a:off x="485548" y="2399326"/>
+            <a:ext cx="10700932" cy="494803"/>
+            <a:chOff x="485548" y="1940563"/>
+            <a:chExt cx="10700932" cy="494803"/>
+          </a:xfrm>
+        </p:grpSpPr>
+        <p:sp>
+          <p:nvSpPr>
+            <p:cNvPr id="4" name="Rectangle 3">
+              <a:extLst>
+                <a:ext uri="{FF2B5EF4-FFF2-40B4-BE49-F238E27FC236}">
+                  <a16:creationId xmlns:a16="http://schemas.microsoft.com/office/drawing/2014/main" id="{FDDCF413-7D2C-A953-6C0E-9A6663DEC647}"/>
+                </a:ext>
+              </a:extLst>
+            </p:cNvPr>
+            <p:cNvSpPr/>
+            <p:nvPr/>
+          </p:nvSpPr>
+          <p:spPr>
+            <a:xfrm>
+              <a:off x="485548" y="1940563"/>
+              <a:ext cx="10691696" cy="494803"/>
+            </a:xfrm>
+            <a:prstGeom prst="rect">
+              <a:avLst/>
+            </a:prstGeom>
+            <a:solidFill>
+              <a:srgbClr val="FFFFFF"/>
+            </a:solidFill>
+            <a:ln>
+              <a:solidFill>
+                <a:srgbClr val="F6F8FA"/>
+              </a:solidFill>
+            </a:ln>
+          </p:spPr>
+          <p:style>
+            <a:lnRef idx="2">
+              <a:schemeClr val="accent1">
+                <a:shade val="15000"/>
+              </a:schemeClr>
+            </a:lnRef>
+            <a:fillRef idx="1">
+              <a:schemeClr val="accent1"/>
+            </a:fillRef>
+            <a:effectRef idx="0">
+              <a:schemeClr val="accent1"/>
+            </a:effectRef>
+            <a:fontRef idx="minor">
+              <a:schemeClr val="lt1"/>
+            </a:fontRef>
+          </p:style>
+          <p:txBody>
+            <a:bodyPr rtlCol="0" anchor="ctr"/>
+            <a:lstStyle/>
+            <a:p>
+              <a:pPr algn="ctr"/>
+              <a:endParaRPr lang="en-US"/>
+            </a:p>
+          </p:txBody>
+        </p:sp>
+        <p:sp>
+          <p:nvSpPr>
+            <p:cNvPr id="6" name="TextBox 5">
+              <a:extLst>
+                <a:ext uri="{FF2B5EF4-FFF2-40B4-BE49-F238E27FC236}">
+                  <a16:creationId xmlns:a16="http://schemas.microsoft.com/office/drawing/2014/main" id="{FAD5D6F8-3314-0652-C62C-069C896D77B5}"/>
+                </a:ext>
+              </a:extLst>
+            </p:cNvPr>
+            <p:cNvSpPr txBox="1"/>
+            <p:nvPr/>
+          </p:nvSpPr>
+          <p:spPr>
+            <a:xfrm>
+              <a:off x="494784" y="2012611"/>
+              <a:ext cx="5461404" cy="307777"/>
+            </a:xfrm>
+            <a:prstGeom prst="rect">
+              <a:avLst/>
+            </a:prstGeom>
+            <a:noFill/>
+          </p:spPr>
+          <p:txBody>
+            <a:bodyPr wrap="square" rtlCol="0">
+              <a:spAutoFit/>
+            </a:bodyPr>
+            <a:lstStyle/>
+            <a:p>
+              <a:pPr algn="ctr"/>
+              <a:r>
+                <a:rPr lang="en-US" sz="1400" dirty="0">
+                  <a:solidFill>
+                    <a:srgbClr val="464C58"/>
+                  </a:solidFill>
+                </a:rPr>
+                <a:t>AI Adoption Across Industries</a:t>
+              </a:r>
+            </a:p>
+          </p:txBody>
+        </p:sp>
+        <p:sp>
+          <p:nvSpPr>
+            <p:cNvPr id="10" name="TextBox 9">
+              <a:extLst>
+                <a:ext uri="{FF2B5EF4-FFF2-40B4-BE49-F238E27FC236}">
+                  <a16:creationId xmlns:a16="http://schemas.microsoft.com/office/drawing/2014/main" id="{E41687A2-E63D-2FF2-C77D-170C26FC3774}"/>
+                </a:ext>
+              </a:extLst>
+            </p:cNvPr>
+            <p:cNvSpPr txBox="1"/>
+            <p:nvPr/>
+          </p:nvSpPr>
+          <p:spPr>
+            <a:xfrm>
+              <a:off x="6093141" y="2012611"/>
+              <a:ext cx="5093339" cy="307777"/>
+            </a:xfrm>
+            <a:prstGeom prst="rect">
+              <a:avLst/>
+            </a:prstGeom>
+            <a:noFill/>
+          </p:spPr>
+          <p:txBody>
+            <a:bodyPr wrap="square" rtlCol="0">
+              <a:spAutoFit/>
+            </a:bodyPr>
+            <a:lstStyle/>
+            <a:p>
+              <a:pPr algn="ctr"/>
+              <a:r>
+                <a:rPr lang="en-US" sz="1400" dirty="0">
+                  <a:solidFill>
+                    <a:srgbClr val="464C58"/>
+                  </a:solidFill>
+                </a:rPr>
+                <a:t>Global AI Adoption Intensity by Country</a:t>
+              </a:r>
+            </a:p>
+          </p:txBody>
+        </p:sp>
+      </p:grpSp>
+      <p:sp>
+        <p:nvSpPr>
+          <p:cNvPr id="14" name="Rectangle 13">
+            <a:extLst>
+              <a:ext uri="{FF2B5EF4-FFF2-40B4-BE49-F238E27FC236}">
+                <a16:creationId xmlns:a16="http://schemas.microsoft.com/office/drawing/2014/main" id="{0BB81837-DEA0-1A05-EE52-E4C3B5E043ED}"/>
+              </a:ext>
+            </a:extLst>
+          </p:cNvPr>
+          <p:cNvSpPr/>
+          <p:nvPr/>
+        </p:nvSpPr>
+        <p:spPr>
+          <a:xfrm>
+            <a:off x="6003241" y="2894129"/>
+            <a:ext cx="156189" cy="2669197"/>
+          </a:xfrm>
+          <a:prstGeom prst="rect">
+            <a:avLst/>
+          </a:prstGeom>
+          <a:solidFill>
+            <a:srgbClr val="F6F8FA"/>
+          </a:solidFill>
+          <a:ln>
+            <a:noFill/>
+          </a:ln>
+        </p:spPr>
+        <p:style>
+          <a:lnRef idx="2">
+            <a:schemeClr val="accent1">
+              <a:shade val="15000"/>
+            </a:schemeClr>
+          </a:lnRef>
+          <a:fillRef idx="1">
+            <a:schemeClr val="accent1"/>
+          </a:fillRef>
+          <a:effectRef idx="0">
+            <a:schemeClr val="accent1"/>
+          </a:effectRef>
+          <a:fontRef idx="minor">
+            <a:schemeClr val="lt1"/>
+          </a:fontRef>
+        </p:style>
+        <p:txBody>
+          <a:bodyPr rtlCol="0" anchor="ctr"/>
+          <a:lstStyle/>
+          <a:p>
+            <a:pPr algn="ctr"/>
+            <a:endParaRPr lang="en-US"/>
+          </a:p>
+        </p:txBody>
+      </p:sp>
     </p:spTree>
     <p:extLst>
       <p:ext uri="{BB962C8B-B14F-4D97-AF65-F5344CB8AC3E}">
@@ -11432,15 +11692,15 @@
         </p:nvPicPr>
         <p:blipFill>
           <a:blip r:embed="rId3"/>
-          <a:srcRect l="2153" r="644" b="1"/>
+          <a:srcRect l="-1916" t="-1" r="644" b="2"/>
           <a:stretch>
             <a:fillRect/>
           </a:stretch>
         </p:blipFill>
         <p:spPr>
           <a:xfrm>
-            <a:off x="2407920" y="1971071"/>
-            <a:ext cx="6762710" cy="4156949"/>
+            <a:off x="2124891" y="1971071"/>
+            <a:ext cx="7045739" cy="4156949"/>
           </a:xfrm>
           <a:prstGeom prst="rect">
             <a:avLst/>

--- a/Presentation/Global AI Adoption & Workforce Impact Dataset09Jun.pptx
+++ b/Presentation/Global AI Adoption & Workforce Impact Dataset09Jun.pptx
@@ -4239,7 +4239,7 @@
           <a:p>
             <a:fld id="{868C6B24-4B47-4CBB-A1F4-8E5735CF3BA4}" type="datetimeFigureOut">
               <a:rPr lang="en-US" smtClean="0"/>
-              <a:t>6/8/2026</a:t>
+              <a:t>6/10/2026</a:t>
             </a:fld>
             <a:endParaRPr lang="en-US"/>
           </a:p>
@@ -5412,7 +5412,7 @@
           <a:p>
             <a:fld id="{3A05994F-B708-4CDD-9FAD-1FB834AA18DC}" type="datetimeFigureOut">
               <a:rPr lang="en-US" smtClean="0"/>
-              <a:t>6/8/2026</a:t>
+              <a:t>6/10/2026</a:t>
             </a:fld>
             <a:endParaRPr lang="en-US"/>
           </a:p>
@@ -5610,7 +5610,7 @@
           <a:p>
             <a:fld id="{3A05994F-B708-4CDD-9FAD-1FB834AA18DC}" type="datetimeFigureOut">
               <a:rPr lang="en-US" smtClean="0"/>
-              <a:t>6/8/2026</a:t>
+              <a:t>6/10/2026</a:t>
             </a:fld>
             <a:endParaRPr lang="en-US"/>
           </a:p>
@@ -5818,7 +5818,7 @@
           <a:p>
             <a:fld id="{3A05994F-B708-4CDD-9FAD-1FB834AA18DC}" type="datetimeFigureOut">
               <a:rPr lang="en-US" smtClean="0"/>
-              <a:t>6/8/2026</a:t>
+              <a:t>6/10/2026</a:t>
             </a:fld>
             <a:endParaRPr lang="en-US"/>
           </a:p>
@@ -6016,7 +6016,7 @@
           <a:p>
             <a:fld id="{3A05994F-B708-4CDD-9FAD-1FB834AA18DC}" type="datetimeFigureOut">
               <a:rPr lang="en-US" smtClean="0"/>
-              <a:t>6/8/2026</a:t>
+              <a:t>6/10/2026</a:t>
             </a:fld>
             <a:endParaRPr lang="en-US"/>
           </a:p>
@@ -6291,7 +6291,7 @@
           <a:p>
             <a:fld id="{3A05994F-B708-4CDD-9FAD-1FB834AA18DC}" type="datetimeFigureOut">
               <a:rPr lang="en-US" smtClean="0"/>
-              <a:t>6/8/2026</a:t>
+              <a:t>6/10/2026</a:t>
             </a:fld>
             <a:endParaRPr lang="en-US"/>
           </a:p>
@@ -6556,7 +6556,7 @@
           <a:p>
             <a:fld id="{3A05994F-B708-4CDD-9FAD-1FB834AA18DC}" type="datetimeFigureOut">
               <a:rPr lang="en-US" smtClean="0"/>
-              <a:t>6/8/2026</a:t>
+              <a:t>6/10/2026</a:t>
             </a:fld>
             <a:endParaRPr lang="en-US"/>
           </a:p>
@@ -6968,7 +6968,7 @@
           <a:p>
             <a:fld id="{3A05994F-B708-4CDD-9FAD-1FB834AA18DC}" type="datetimeFigureOut">
               <a:rPr lang="en-US" smtClean="0"/>
-              <a:t>6/8/2026</a:t>
+              <a:t>6/10/2026</a:t>
             </a:fld>
             <a:endParaRPr lang="en-US"/>
           </a:p>
@@ -7109,7 +7109,7 @@
           <a:p>
             <a:fld id="{3A05994F-B708-4CDD-9FAD-1FB834AA18DC}" type="datetimeFigureOut">
               <a:rPr lang="en-US" smtClean="0"/>
-              <a:t>6/8/2026</a:t>
+              <a:t>6/10/2026</a:t>
             </a:fld>
             <a:endParaRPr lang="en-US"/>
           </a:p>
@@ -7222,7 +7222,7 @@
           <a:p>
             <a:fld id="{3A05994F-B708-4CDD-9FAD-1FB834AA18DC}" type="datetimeFigureOut">
               <a:rPr lang="en-US" smtClean="0"/>
-              <a:t>6/8/2026</a:t>
+              <a:t>6/10/2026</a:t>
             </a:fld>
             <a:endParaRPr lang="en-US"/>
           </a:p>
@@ -7533,7 +7533,7 @@
           <a:p>
             <a:fld id="{3A05994F-B708-4CDD-9FAD-1FB834AA18DC}" type="datetimeFigureOut">
               <a:rPr lang="en-US" smtClean="0"/>
-              <a:t>6/8/2026</a:t>
+              <a:t>6/10/2026</a:t>
             </a:fld>
             <a:endParaRPr lang="en-US"/>
           </a:p>
@@ -7821,7 +7821,7 @@
           <a:p>
             <a:fld id="{3A05994F-B708-4CDD-9FAD-1FB834AA18DC}" type="datetimeFigureOut">
               <a:rPr lang="en-US" smtClean="0"/>
-              <a:t>6/8/2026</a:t>
+              <a:t>6/10/2026</a:t>
             </a:fld>
             <a:endParaRPr lang="en-US"/>
           </a:p>
@@ -8062,7 +8062,7 @@
           <a:p>
             <a:fld id="{3A05994F-B708-4CDD-9FAD-1FB834AA18DC}" type="datetimeFigureOut">
               <a:rPr lang="en-US" smtClean="0"/>
-              <a:t>6/8/2026</a:t>
+              <a:t>6/10/2026</a:t>
             </a:fld>
             <a:endParaRPr lang="en-US"/>
           </a:p>
@@ -8695,13 +8695,28 @@
           <a:p>
             <a:pPr algn="l"/>
             <a:r>
+              <a:rPr lang="en-US" sz="4000" b="1" dirty="0"/>
+              <a:t>Global AI </a:t>
+            </a:r>
+            <a:r>
               <a:rPr lang="en-US" sz="4000" b="1"/>
-              <a:t>Global AI Adoption &amp; Workforce Impact Analysis</a:t>
+              <a:t>Adoption </a:t>
             </a:r>
             <a:br>
               <a:rPr lang="en-US" sz="4000" b="1"/>
             </a:br>
-            <a:endParaRPr lang="en-US" sz="4000"/>
+            <a:r>
+              <a:rPr lang="en-US" sz="4000" b="1"/>
+              <a:t>Impact </a:t>
+            </a:r>
+            <a:r>
+              <a:rPr lang="en-US" sz="4000" b="1" dirty="0"/>
+              <a:t>Analysis</a:t>
+            </a:r>
+            <a:br>
+              <a:rPr lang="en-US" sz="4000" b="1" dirty="0"/>
+            </a:br>
+            <a:endParaRPr lang="en-US" sz="4000" dirty="0"/>
           </a:p>
         </p:txBody>
       </p:sp>
@@ -8751,7 +8766,7 @@
             <a:pPr algn="l"/>
             <a:r>
               <a:rPr lang="en-US" sz="2000" dirty="0"/>
-              <a:t>CAO: 09JUN26</a:t>
+              <a:t>CAO: 10JUN26</a:t>
             </a:r>
           </a:p>
         </p:txBody>
